--- a/ppt/IoTAI20-LiteRT.pptx
+++ b/ppt/IoTAI20-LiteRT.pptx
@@ -5,10 +5,10 @@
     <p:sldMasterId id="2147483653" r:id="rId1"/>
   </p:sldMasterIdLst>
   <p:notesMasterIdLst>
-    <p:notesMasterId r:id="rId28"/>
+    <p:notesMasterId r:id="rId29"/>
   </p:notesMasterIdLst>
   <p:handoutMasterIdLst>
-    <p:handoutMasterId r:id="rId29"/>
+    <p:handoutMasterId r:id="rId30"/>
   </p:handoutMasterIdLst>
   <p:sldIdLst>
     <p:sldId id="264" r:id="rId2"/>
@@ -28,15 +28,16 @@
     <p:sldId id="291" r:id="rId16"/>
     <p:sldId id="279" r:id="rId17"/>
     <p:sldId id="280" r:id="rId18"/>
-    <p:sldId id="281" r:id="rId19"/>
-    <p:sldId id="282" r:id="rId20"/>
-    <p:sldId id="283" r:id="rId21"/>
-    <p:sldId id="284" r:id="rId22"/>
-    <p:sldId id="285" r:id="rId23"/>
-    <p:sldId id="286" r:id="rId24"/>
-    <p:sldId id="287" r:id="rId25"/>
-    <p:sldId id="292" r:id="rId26"/>
-    <p:sldId id="289" r:id="rId27"/>
+    <p:sldId id="301" r:id="rId19"/>
+    <p:sldId id="281" r:id="rId20"/>
+    <p:sldId id="282" r:id="rId21"/>
+    <p:sldId id="283" r:id="rId22"/>
+    <p:sldId id="284" r:id="rId23"/>
+    <p:sldId id="285" r:id="rId24"/>
+    <p:sldId id="286" r:id="rId25"/>
+    <p:sldId id="287" r:id="rId26"/>
+    <p:sldId id="292" r:id="rId27"/>
+    <p:sldId id="289" r:id="rId28"/>
   </p:sldIdLst>
   <p:sldSz cx="9144000" cy="6858000" type="screen4x3"/>
   <p:notesSz cx="6648450" cy="9782175"/>
@@ -4929,7 +4930,13 @@
       </p:grpSpPr>
       <p:sp>
         <p:nvSpPr>
-          <p:cNvPr id="2" name="Titre 1"/>
+          <p:cNvPr id="2" name="Titre 1">
+            <a:extLst>
+              <a:ext uri="{FF2B5EF4-FFF2-40B4-BE49-F238E27FC236}">
+                <a16:creationId xmlns:a16="http://schemas.microsoft.com/office/drawing/2014/main" id="{1DAC6439-8A68-D93F-604A-D80B2F730741}"/>
+              </a:ext>
+            </a:extLst>
+          </p:cNvPr>
           <p:cNvSpPr>
             <a:spLocks noGrp="1"/>
           </p:cNvSpPr>
@@ -4944,19 +4951,20 @@
           <a:p>
             <a:r>
               <a:rPr lang="fr-FR" dirty="0"/>
-              <a:t>Post </a:t>
-            </a:r>
-            <a:r>
-              <a:rPr lang="fr-FR" dirty="0" err="1"/>
-              <a:t>Quantization</a:t>
-            </a:r>
-            <a:endParaRPr lang="fr-FR" dirty="0"/>
-          </a:p>
-        </p:txBody>
-      </p:sp>
-      <p:sp>
-        <p:nvSpPr>
-          <p:cNvPr id="3" name="Espace réservé du contenu 2"/>
+              <a:t>Optimisations</a:t>
+            </a:r>
+          </a:p>
+        </p:txBody>
+      </p:sp>
+      <p:sp>
+        <p:nvSpPr>
+          <p:cNvPr id="3" name="Espace réservé du contenu 2">
+            <a:extLst>
+              <a:ext uri="{FF2B5EF4-FFF2-40B4-BE49-F238E27FC236}">
+                <a16:creationId xmlns:a16="http://schemas.microsoft.com/office/drawing/2014/main" id="{7F17BA94-950B-F118-7609-122480F498B8}"/>
+              </a:ext>
+            </a:extLst>
+          </p:cNvPr>
           <p:cNvSpPr>
             <a:spLocks noGrp="1"/>
           </p:cNvSpPr>
@@ -4969,61 +4977,44 @@
           <a:bodyPr/>
           <a:lstStyle/>
           <a:p>
-            <a:r>
-              <a:rPr lang="fr-FR" dirty="0"/>
-              <a:t>La commande est très simple</a:t>
-            </a:r>
-          </a:p>
-          <a:p>
-            <a:pPr lvl="1"/>
-            <a:r>
-              <a:rPr lang="fr-FR" dirty="0" err="1"/>
-              <a:t>converter.optimizations</a:t>
-            </a:r>
-            <a:r>
-              <a:rPr lang="fr-FR" dirty="0"/>
-              <a:t> = [</a:t>
-            </a:r>
-            <a:r>
-              <a:rPr lang="fr-FR" dirty="0" err="1"/>
-              <a:t>tf.lite.Optimize.DEFAULT</a:t>
-            </a:r>
-            <a:r>
-              <a:rPr lang="fr-FR" dirty="0"/>
-              <a:t>]</a:t>
-            </a:r>
-          </a:p>
-          <a:p>
-            <a:pPr lvl="1"/>
-            <a:r>
-              <a:rPr lang="fr-FR" dirty="0"/>
-              <a:t>Par défaut 8 bits</a:t>
-            </a:r>
-          </a:p>
-          <a:p>
-            <a:pPr lvl="1"/>
-            <a:r>
-              <a:rPr lang="fr-FR" dirty="0"/>
-              <a:t>Pour passer en 16 bits</a:t>
-            </a:r>
-          </a:p>
-          <a:p>
-            <a:pPr lvl="1"/>
-            <a:r>
-              <a:rPr lang="fr-FR" dirty="0" err="1"/>
-              <a:t>converter.target_spec.supported_types</a:t>
-            </a:r>
-            <a:r>
-              <a:rPr lang="fr-FR" dirty="0"/>
-              <a:t> = [tf.float16]</a:t>
-            </a:r>
-          </a:p>
-        </p:txBody>
-      </p:sp>
+            <a:endParaRPr lang="fr-FR"/>
+          </a:p>
+        </p:txBody>
+      </p:sp>
+      <p:pic>
+        <p:nvPicPr>
+          <p:cNvPr id="7" name="Image 6">
+            <a:extLst>
+              <a:ext uri="{FF2B5EF4-FFF2-40B4-BE49-F238E27FC236}">
+                <a16:creationId xmlns:a16="http://schemas.microsoft.com/office/drawing/2014/main" id="{618FD41D-A02F-35FB-9959-900774021328}"/>
+              </a:ext>
+            </a:extLst>
+          </p:cNvPr>
+          <p:cNvPicPr>
+            <a:picLocks noChangeAspect="1"/>
+          </p:cNvPicPr>
+          <p:nvPr/>
+        </p:nvPicPr>
+        <p:blipFill>
+          <a:blip r:embed="rId2"/>
+          <a:stretch>
+            <a:fillRect/>
+          </a:stretch>
+        </p:blipFill>
+        <p:spPr>
+          <a:xfrm>
+            <a:off x="395127" y="1404239"/>
+            <a:ext cx="8545500" cy="4290142"/>
+          </a:xfrm>
+          <a:prstGeom prst="rect">
+            <a:avLst/>
+          </a:prstGeom>
+        </p:spPr>
+      </p:pic>
     </p:spTree>
     <p:extLst>
       <p:ext uri="{BB962C8B-B14F-4D97-AF65-F5344CB8AC3E}">
-        <p14:creationId xmlns:p14="http://schemas.microsoft.com/office/powerpoint/2010/main" val="88853770"/>
+        <p14:creationId xmlns:p14="http://schemas.microsoft.com/office/powerpoint/2010/main" val="818652192"/>
       </p:ext>
     </p:extLst>
   </p:cSld>
@@ -5094,15 +5085,7 @@
           <a:p>
             <a:r>
               <a:rPr lang="fr-FR" dirty="0"/>
-              <a:t>Il possible de </a:t>
-            </a:r>
-            <a:r>
-              <a:rPr lang="fr-FR" dirty="0" err="1"/>
-              <a:t>quantiser</a:t>
-            </a:r>
-            <a:r>
-              <a:rPr lang="fr-FR" dirty="0"/>
-              <a:t> les fonctions d'activation</a:t>
+              <a:t>La commande est très simple</a:t>
             </a:r>
           </a:p>
           <a:p>
@@ -5117,11 +5100,36 @@
             </a:r>
             <a:r>
               <a:rPr lang="fr-FR" dirty="0" err="1"/>
-              <a:t>tf.lite.Optimize.OPTIMIZE_FOR_SIZE</a:t>
+              <a:t>tf.lite.Optimize.DEFAULT</a:t>
             </a:r>
             <a:r>
               <a:rPr lang="fr-FR" dirty="0"/>
               <a:t>]</a:t>
+            </a:r>
+          </a:p>
+          <a:p>
+            <a:pPr lvl="1"/>
+            <a:r>
+              <a:rPr lang="fr-FR" dirty="0"/>
+              <a:t>Par défaut 8 bits</a:t>
+            </a:r>
+          </a:p>
+          <a:p>
+            <a:pPr lvl="1"/>
+            <a:r>
+              <a:rPr lang="fr-FR" dirty="0"/>
+              <a:t>Pour passer en 16 bits</a:t>
+            </a:r>
+          </a:p>
+          <a:p>
+            <a:pPr lvl="1"/>
+            <a:r>
+              <a:rPr lang="fr-FR" dirty="0" err="1"/>
+              <a:t>converter.target_spec.supported_types</a:t>
+            </a:r>
+            <a:r>
+              <a:rPr lang="fr-FR" dirty="0"/>
+              <a:t> = [tf.float16]</a:t>
             </a:r>
           </a:p>
         </p:txBody>
@@ -5129,7 +5137,7 @@
     </p:spTree>
     <p:extLst>
       <p:ext uri="{BB962C8B-B14F-4D97-AF65-F5344CB8AC3E}">
-        <p14:creationId xmlns:p14="http://schemas.microsoft.com/office/powerpoint/2010/main" val="4186817699"/>
+        <p14:creationId xmlns:p14="http://schemas.microsoft.com/office/powerpoint/2010/main" val="88853770"/>
       </p:ext>
     </p:extLst>
   </p:cSld>
@@ -5406,8 +5414,12 @@
           <a:lstStyle/>
           <a:p>
             <a:r>
+              <a:rPr lang="fr-FR" dirty="0"/>
+              <a:t>Post </a:t>
+            </a:r>
+            <a:r>
               <a:rPr lang="fr-FR" dirty="0" err="1"/>
-              <a:t>Pruning</a:t>
+              <a:t>Quantization</a:t>
             </a:r>
             <a:endParaRPr lang="fr-FR" dirty="0"/>
           </a:p>
@@ -5430,59 +5442,42 @@
           <a:p>
             <a:r>
               <a:rPr lang="fr-FR" dirty="0"/>
-              <a:t>Le </a:t>
+              <a:t>Il possible de </a:t>
             </a:r>
             <a:r>
               <a:rPr lang="fr-FR" dirty="0" err="1"/>
-              <a:t>Pruning</a:t>
-            </a:r>
-            <a:r>
-              <a:rPr lang="fr-FR" dirty="0"/>
-              <a:t> est une méthode TF pour élaguer les poids proches de 0</a:t>
-            </a:r>
-          </a:p>
-          <a:p>
-            <a:pPr lvl="1"/>
-            <a:r>
-              <a:rPr lang="fr-FR" dirty="0"/>
-              <a:t>Constat : les poids proches de 0 participent peu au résultat</a:t>
+              <a:t>quantiser</a:t>
+            </a:r>
+            <a:r>
+              <a:rPr lang="fr-FR" dirty="0"/>
+              <a:t> les fonctions d'activation</a:t>
             </a:r>
           </a:p>
           <a:p>
             <a:pPr lvl="1"/>
             <a:r>
               <a:rPr lang="fr-FR" dirty="0" err="1"/>
-              <a:t>DropConnect</a:t>
-            </a:r>
-            <a:r>
-              <a:rPr lang="fr-FR" dirty="0"/>
-              <a:t> permanent</a:t>
-            </a:r>
-          </a:p>
-          <a:p>
-            <a:pPr lvl="1"/>
-            <a:r>
-              <a:rPr lang="fr-FR" dirty="0"/>
-              <a:t>Un poids exactement = 0 n'évoluera plus</a:t>
-            </a:r>
-          </a:p>
-          <a:p>
-            <a:pPr lvl="1"/>
-            <a:r>
-              <a:rPr lang="fr-FR" dirty="0"/>
-              <a:t>D'abord les poids &lt; 0.1 puis augmente avec le temps</a:t>
-            </a:r>
-          </a:p>
-          <a:p>
-            <a:pPr lvl="1"/>
-            <a:endParaRPr lang="fr-FR" dirty="0"/>
+              <a:t>converter.optimizations</a:t>
+            </a:r>
+            <a:r>
+              <a:rPr lang="fr-FR" dirty="0"/>
+              <a:t> = [</a:t>
+            </a:r>
+            <a:r>
+              <a:rPr lang="fr-FR" dirty="0" err="1"/>
+              <a:t>tf.lite.Optimize.OPTIMIZE_FOR_SIZE</a:t>
+            </a:r>
+            <a:r>
+              <a:rPr lang="fr-FR" dirty="0"/>
+              <a:t>]</a:t>
+            </a:r>
           </a:p>
         </p:txBody>
       </p:sp>
     </p:spTree>
     <p:extLst>
       <p:ext uri="{BB962C8B-B14F-4D97-AF65-F5344CB8AC3E}">
-        <p14:creationId xmlns:p14="http://schemas.microsoft.com/office/powerpoint/2010/main" val="4108801755"/>
+        <p14:creationId xmlns:p14="http://schemas.microsoft.com/office/powerpoint/2010/main" val="4186817699"/>
       </p:ext>
     </p:extLst>
   </p:cSld>
@@ -5526,6 +5521,125 @@
           <a:p>
             <a:r>
               <a:rPr lang="fr-FR" dirty="0" err="1"/>
+              <a:t>Pruning</a:t>
+            </a:r>
+            <a:endParaRPr lang="fr-FR" dirty="0"/>
+          </a:p>
+        </p:txBody>
+      </p:sp>
+      <p:sp>
+        <p:nvSpPr>
+          <p:cNvPr id="3" name="Espace réservé du contenu 2"/>
+          <p:cNvSpPr>
+            <a:spLocks noGrp="1"/>
+          </p:cNvSpPr>
+          <p:nvPr>
+            <p:ph idx="1"/>
+          </p:nvPr>
+        </p:nvSpPr>
+        <p:spPr/>
+        <p:txBody>
+          <a:bodyPr/>
+          <a:lstStyle/>
+          <a:p>
+            <a:r>
+              <a:rPr lang="fr-FR" dirty="0"/>
+              <a:t>Le </a:t>
+            </a:r>
+            <a:r>
+              <a:rPr lang="fr-FR" dirty="0" err="1"/>
+              <a:t>Pruning</a:t>
+            </a:r>
+            <a:r>
+              <a:rPr lang="fr-FR" dirty="0"/>
+              <a:t> est une méthode TF pour élaguer les poids proches de 0</a:t>
+            </a:r>
+          </a:p>
+          <a:p>
+            <a:pPr lvl="1"/>
+            <a:r>
+              <a:rPr lang="fr-FR" dirty="0"/>
+              <a:t>Constat : les poids proches de 0 participent peu au résultat</a:t>
+            </a:r>
+          </a:p>
+          <a:p>
+            <a:pPr lvl="1"/>
+            <a:r>
+              <a:rPr lang="fr-FR" dirty="0" err="1"/>
+              <a:t>DropConnect</a:t>
+            </a:r>
+            <a:r>
+              <a:rPr lang="fr-FR" dirty="0"/>
+              <a:t> permanent</a:t>
+            </a:r>
+          </a:p>
+          <a:p>
+            <a:pPr lvl="1"/>
+            <a:r>
+              <a:rPr lang="fr-FR" dirty="0"/>
+              <a:t>Un poids exactement = 0 n'évoluera plus</a:t>
+            </a:r>
+          </a:p>
+          <a:p>
+            <a:pPr lvl="1"/>
+            <a:r>
+              <a:rPr lang="fr-FR" dirty="0"/>
+              <a:t>D'abord les poids &lt; 0.1 puis augmente avec le temps</a:t>
+            </a:r>
+          </a:p>
+          <a:p>
+            <a:pPr lvl="1"/>
+            <a:endParaRPr lang="fr-FR" dirty="0"/>
+          </a:p>
+        </p:txBody>
+      </p:sp>
+    </p:spTree>
+    <p:extLst>
+      <p:ext uri="{BB962C8B-B14F-4D97-AF65-F5344CB8AC3E}">
+        <p14:creationId xmlns:p14="http://schemas.microsoft.com/office/powerpoint/2010/main" val="4108801755"/>
+      </p:ext>
+    </p:extLst>
+  </p:cSld>
+  <p:clrMapOvr>
+    <a:masterClrMapping/>
+  </p:clrMapOvr>
+</p:sld>
+</file>
+
+<file path=ppt/slides/slide22.xml><?xml version="1.0" encoding="utf-8"?>
+<p:sld xmlns:a="http://schemas.openxmlformats.org/drawingml/2006/main" xmlns:r="http://schemas.openxmlformats.org/officeDocument/2006/relationships" xmlns:p="http://schemas.openxmlformats.org/presentationml/2006/main">
+  <p:cSld>
+    <p:spTree>
+      <p:nvGrpSpPr>
+        <p:cNvPr id="1" name=""/>
+        <p:cNvGrpSpPr/>
+        <p:nvPr/>
+      </p:nvGrpSpPr>
+      <p:grpSpPr>
+        <a:xfrm>
+          <a:off x="0" y="0"/>
+          <a:ext cx="0" cy="0"/>
+          <a:chOff x="0" y="0"/>
+          <a:chExt cx="0" cy="0"/>
+        </a:xfrm>
+      </p:grpSpPr>
+      <p:sp>
+        <p:nvSpPr>
+          <p:cNvPr id="2" name="Titre 1"/>
+          <p:cNvSpPr>
+            <a:spLocks noGrp="1"/>
+          </p:cNvSpPr>
+          <p:nvPr>
+            <p:ph type="title"/>
+          </p:nvPr>
+        </p:nvSpPr>
+        <p:spPr/>
+        <p:txBody>
+          <a:bodyPr/>
+          <a:lstStyle/>
+          <a:p>
+            <a:r>
+              <a:rPr lang="fr-FR" dirty="0" err="1"/>
               <a:t>Tensorflow</a:t>
             </a:r>
             <a:r>
@@ -5627,7 +5741,7 @@
 </p:sld>
 </file>
 
-<file path=ppt/slides/slide22.xml><?xml version="1.0" encoding="utf-8"?>
+<file path=ppt/slides/slide23.xml><?xml version="1.0" encoding="utf-8"?>
 <p:sld xmlns:a="http://schemas.openxmlformats.org/drawingml/2006/main" xmlns:r="http://schemas.openxmlformats.org/officeDocument/2006/relationships" xmlns:p="http://schemas.openxmlformats.org/presentationml/2006/main">
   <p:cSld>
     <p:spTree>
@@ -5741,194 +5855,6 @@
 </p:sld>
 </file>
 
-<file path=ppt/slides/slide23.xml><?xml version="1.0" encoding="utf-8"?>
-<p:sld xmlns:a="http://schemas.openxmlformats.org/drawingml/2006/main" xmlns:r="http://schemas.openxmlformats.org/officeDocument/2006/relationships" xmlns:p="http://schemas.openxmlformats.org/presentationml/2006/main">
-  <p:cSld>
-    <p:spTree>
-      <p:nvGrpSpPr>
-        <p:cNvPr id="1" name=""/>
-        <p:cNvGrpSpPr/>
-        <p:nvPr/>
-      </p:nvGrpSpPr>
-      <p:grpSpPr>
-        <a:xfrm>
-          <a:off x="0" y="0"/>
-          <a:ext cx="0" cy="0"/>
-          <a:chOff x="0" y="0"/>
-          <a:chExt cx="0" cy="0"/>
-        </a:xfrm>
-      </p:grpSpPr>
-      <p:sp>
-        <p:nvSpPr>
-          <p:cNvPr id="2" name="Titre 1"/>
-          <p:cNvSpPr>
-            <a:spLocks noGrp="1"/>
-          </p:cNvSpPr>
-          <p:nvPr>
-            <p:ph type="title"/>
-          </p:nvPr>
-        </p:nvSpPr>
-        <p:spPr/>
-        <p:txBody>
-          <a:bodyPr/>
-          <a:lstStyle/>
-          <a:p>
-            <a:r>
-              <a:rPr lang="fr-FR" dirty="0" err="1"/>
-              <a:t>Aware</a:t>
-            </a:r>
-            <a:r>
-              <a:rPr lang="fr-FR" dirty="0"/>
-              <a:t> </a:t>
-            </a:r>
-            <a:r>
-              <a:rPr lang="fr-FR" dirty="0" err="1"/>
-              <a:t>Quantization</a:t>
-            </a:r>
-            <a:endParaRPr lang="fr-FR" dirty="0"/>
-          </a:p>
-        </p:txBody>
-      </p:sp>
-      <p:sp>
-        <p:nvSpPr>
-          <p:cNvPr id="3" name="Espace réservé du contenu 2"/>
-          <p:cNvSpPr>
-            <a:spLocks noGrp="1"/>
-          </p:cNvSpPr>
-          <p:nvPr>
-            <p:ph idx="1"/>
-          </p:nvPr>
-        </p:nvSpPr>
-        <p:spPr/>
-        <p:txBody>
-          <a:bodyPr/>
-          <a:lstStyle/>
-          <a:p>
-            <a:r>
-              <a:rPr lang="fr-FR" dirty="0"/>
-              <a:t>C'est une Pré-</a:t>
-            </a:r>
-            <a:r>
-              <a:rPr lang="fr-FR" dirty="0" err="1"/>
-              <a:t>quantization</a:t>
-            </a:r>
-            <a:endParaRPr lang="fr-FR" dirty="0"/>
-          </a:p>
-          <a:p>
-            <a:pPr lvl="1"/>
-            <a:r>
-              <a:rPr lang="fr-FR" dirty="0"/>
-              <a:t>Permet sous TF de </a:t>
-            </a:r>
-            <a:r>
-              <a:rPr lang="fr-FR" dirty="0" err="1"/>
-              <a:t>quantiser</a:t>
-            </a:r>
-            <a:r>
-              <a:rPr lang="fr-FR" dirty="0"/>
-              <a:t> les poids avant apprentissage sur 8 bits ou 16 bits</a:t>
-            </a:r>
-          </a:p>
-          <a:p>
-            <a:pPr lvl="1"/>
-            <a:r>
-              <a:rPr lang="fr-FR" dirty="0"/>
-              <a:t>Attention les poids sont toujours sur 64 bits</a:t>
-            </a:r>
-          </a:p>
-          <a:p>
-            <a:pPr lvl="1"/>
-            <a:r>
-              <a:rPr lang="fr-FR" dirty="0"/>
-              <a:t>Seuls les pas d'apprentissages sont de 1/256 ou 1/65536</a:t>
-            </a:r>
-          </a:p>
-          <a:p>
-            <a:pPr lvl="1"/>
-            <a:r>
-              <a:rPr lang="fr-FR" dirty="0"/>
-              <a:t>Post </a:t>
-            </a:r>
-            <a:r>
-              <a:rPr lang="fr-FR" dirty="0" err="1"/>
-              <a:t>Quantization</a:t>
-            </a:r>
-            <a:r>
-              <a:rPr lang="fr-FR" dirty="0"/>
-              <a:t> </a:t>
-            </a:r>
-            <a:r>
-              <a:rPr lang="fr-FR" dirty="0" err="1"/>
-              <a:t>TFLite</a:t>
-            </a:r>
-            <a:r>
-              <a:rPr lang="fr-FR" dirty="0"/>
-              <a:t> obligatoire</a:t>
-            </a:r>
-          </a:p>
-          <a:p>
-            <a:pPr lvl="1"/>
-            <a:r>
-              <a:rPr lang="fr-FR" dirty="0"/>
-              <a:t>Plus précis</a:t>
-            </a:r>
-          </a:p>
-          <a:p>
-            <a:pPr lvl="1"/>
-            <a:r>
-              <a:rPr lang="fr-FR" dirty="0"/>
-              <a:t>Nécessite un réapprentissage</a:t>
-            </a:r>
-          </a:p>
-          <a:p>
-            <a:pPr lvl="1"/>
-            <a:r>
-              <a:rPr lang="fr-FR" dirty="0"/>
-              <a:t>model = </a:t>
-            </a:r>
-            <a:r>
-              <a:rPr lang="fr-FR" dirty="0" err="1"/>
-              <a:t>tfmot.quantization.keras.quantize_model</a:t>
-            </a:r>
-            <a:r>
-              <a:rPr lang="fr-FR" dirty="0"/>
-              <a:t>(model)</a:t>
-            </a:r>
-          </a:p>
-          <a:p>
-            <a:r>
-              <a:rPr lang="fr-FR" dirty="0"/>
-              <a:t>Inutile depuis que </a:t>
-            </a:r>
-            <a:r>
-              <a:rPr lang="fr-FR" dirty="0" err="1"/>
-              <a:t>TFLite</a:t>
-            </a:r>
-            <a:r>
-              <a:rPr lang="fr-FR" dirty="0"/>
-              <a:t> sait refaire des inférences pendant la </a:t>
-            </a:r>
-            <a:r>
-              <a:rPr lang="fr-FR" dirty="0" err="1"/>
-              <a:t>quantisation</a:t>
-            </a:r>
-            <a:endParaRPr lang="fr-FR" dirty="0"/>
-          </a:p>
-        </p:txBody>
-      </p:sp>
-    </p:spTree>
-    <p:extLst>
-      <p:ext uri="{BB962C8B-B14F-4D97-AF65-F5344CB8AC3E}">
-        <p14:creationId xmlns:p14="http://schemas.microsoft.com/office/powerpoint/2010/main" val="1708251"/>
-      </p:ext>
-    </p:extLst>
-  </p:cSld>
-  <p:clrMapOvr>
-    <a:masterClrMapping/>
-  </p:clrMapOvr>
-</p:sld>
-</file>
-
 <file path=ppt/slides/slide24.xml><?xml version="1.0" encoding="utf-8"?>
 <p:sld xmlns:a="http://schemas.openxmlformats.org/drawingml/2006/main" xmlns:r="http://schemas.openxmlformats.org/officeDocument/2006/relationships" xmlns:p="http://schemas.openxmlformats.org/presentationml/2006/main">
   <p:cSld>
@@ -5948,6 +5874,189 @@
       </p:grpSpPr>
       <p:sp>
         <p:nvSpPr>
+          <p:cNvPr id="2" name="Titre 1"/>
+          <p:cNvSpPr>
+            <a:spLocks noGrp="1"/>
+          </p:cNvSpPr>
+          <p:nvPr>
+            <p:ph type="title"/>
+          </p:nvPr>
+        </p:nvSpPr>
+        <p:spPr/>
+        <p:txBody>
+          <a:bodyPr/>
+          <a:lstStyle/>
+          <a:p>
+            <a:r>
+              <a:rPr lang="fr-FR" dirty="0" err="1"/>
+              <a:t>Aware</a:t>
+            </a:r>
+            <a:r>
+              <a:rPr lang="fr-FR" dirty="0"/>
+              <a:t> </a:t>
+            </a:r>
+            <a:r>
+              <a:rPr lang="fr-FR" dirty="0" err="1"/>
+              <a:t>Quantization</a:t>
+            </a:r>
+            <a:endParaRPr lang="fr-FR" dirty="0"/>
+          </a:p>
+        </p:txBody>
+      </p:sp>
+      <p:sp>
+        <p:nvSpPr>
+          <p:cNvPr id="3" name="Espace réservé du contenu 2"/>
+          <p:cNvSpPr>
+            <a:spLocks noGrp="1"/>
+          </p:cNvSpPr>
+          <p:nvPr>
+            <p:ph idx="1"/>
+          </p:nvPr>
+        </p:nvSpPr>
+        <p:spPr/>
+        <p:txBody>
+          <a:bodyPr/>
+          <a:lstStyle/>
+          <a:p>
+            <a:r>
+              <a:rPr lang="fr-FR" dirty="0"/>
+              <a:t>C'est une Pré-</a:t>
+            </a:r>
+            <a:r>
+              <a:rPr lang="fr-FR" dirty="0" err="1"/>
+              <a:t>quantization</a:t>
+            </a:r>
+            <a:endParaRPr lang="fr-FR" dirty="0"/>
+          </a:p>
+          <a:p>
+            <a:pPr lvl="1"/>
+            <a:r>
+              <a:rPr lang="fr-FR" dirty="0"/>
+              <a:t>Permet sous TF de </a:t>
+            </a:r>
+            <a:r>
+              <a:rPr lang="fr-FR" dirty="0" err="1"/>
+              <a:t>quantiser</a:t>
+            </a:r>
+            <a:r>
+              <a:rPr lang="fr-FR" dirty="0"/>
+              <a:t> les poids avant apprentissage sur 8 bits ou 16 bits</a:t>
+            </a:r>
+          </a:p>
+          <a:p>
+            <a:pPr lvl="1"/>
+            <a:r>
+              <a:rPr lang="fr-FR" dirty="0"/>
+              <a:t>Attention les poids sont toujours sur 64 bits</a:t>
+            </a:r>
+          </a:p>
+          <a:p>
+            <a:pPr lvl="1"/>
+            <a:r>
+              <a:rPr lang="fr-FR" dirty="0"/>
+              <a:t>Seuls les pas d'apprentissages sont de 1/256 ou 1/65536</a:t>
+            </a:r>
+          </a:p>
+          <a:p>
+            <a:pPr lvl="1"/>
+            <a:r>
+              <a:rPr lang="fr-FR" dirty="0"/>
+              <a:t>Post </a:t>
+            </a:r>
+            <a:r>
+              <a:rPr lang="fr-FR" dirty="0" err="1"/>
+              <a:t>Quantization</a:t>
+            </a:r>
+            <a:r>
+              <a:rPr lang="fr-FR" dirty="0"/>
+              <a:t> </a:t>
+            </a:r>
+            <a:r>
+              <a:rPr lang="fr-FR" dirty="0" err="1"/>
+              <a:t>TFLite</a:t>
+            </a:r>
+            <a:r>
+              <a:rPr lang="fr-FR" dirty="0"/>
+              <a:t> obligatoire</a:t>
+            </a:r>
+          </a:p>
+          <a:p>
+            <a:pPr lvl="1"/>
+            <a:r>
+              <a:rPr lang="fr-FR" dirty="0"/>
+              <a:t>Plus précis</a:t>
+            </a:r>
+          </a:p>
+          <a:p>
+            <a:pPr lvl="1"/>
+            <a:r>
+              <a:rPr lang="fr-FR" dirty="0"/>
+              <a:t>Nécessite un réapprentissage</a:t>
+            </a:r>
+          </a:p>
+          <a:p>
+            <a:pPr lvl="1"/>
+            <a:r>
+              <a:rPr lang="fr-FR" dirty="0"/>
+              <a:t>model = </a:t>
+            </a:r>
+            <a:r>
+              <a:rPr lang="fr-FR" dirty="0" err="1"/>
+              <a:t>tfmot.quantization.keras.quantize_model</a:t>
+            </a:r>
+            <a:r>
+              <a:rPr lang="fr-FR" dirty="0"/>
+              <a:t>(model)</a:t>
+            </a:r>
+          </a:p>
+          <a:p>
+            <a:r>
+              <a:rPr lang="fr-FR" dirty="0"/>
+              <a:t>Voir HGQ2 </a:t>
+            </a:r>
+            <a:r>
+              <a:rPr lang="fr-FR"/>
+              <a:t>plus tard</a:t>
+            </a:r>
+            <a:endParaRPr lang="fr-FR" dirty="0"/>
+          </a:p>
+          <a:p>
+            <a:endParaRPr lang="fr-FR" dirty="0"/>
+          </a:p>
+        </p:txBody>
+      </p:sp>
+    </p:spTree>
+    <p:extLst>
+      <p:ext uri="{BB962C8B-B14F-4D97-AF65-F5344CB8AC3E}">
+        <p14:creationId xmlns:p14="http://schemas.microsoft.com/office/powerpoint/2010/main" val="1708251"/>
+      </p:ext>
+    </p:extLst>
+  </p:cSld>
+  <p:clrMapOvr>
+    <a:masterClrMapping/>
+  </p:clrMapOvr>
+</p:sld>
+</file>
+
+<file path=ppt/slides/slide25.xml><?xml version="1.0" encoding="utf-8"?>
+<p:sld xmlns:a="http://schemas.openxmlformats.org/drawingml/2006/main" xmlns:r="http://schemas.openxmlformats.org/officeDocument/2006/relationships" xmlns:p="http://schemas.openxmlformats.org/presentationml/2006/main">
+  <p:cSld>
+    <p:spTree>
+      <p:nvGrpSpPr>
+        <p:cNvPr id="1" name=""/>
+        <p:cNvGrpSpPr/>
+        <p:nvPr/>
+      </p:nvGrpSpPr>
+      <p:grpSpPr>
+        <a:xfrm>
+          <a:off x="0" y="0"/>
+          <a:ext cx="0" cy="0"/>
+          <a:chOff x="0" y="0"/>
+          <a:chExt cx="0" cy="0"/>
+        </a:xfrm>
+      </p:grpSpPr>
+      <p:sp>
+        <p:nvSpPr>
           <p:cNvPr id="2" name="Titre 1">
             <a:extLst>
               <a:ext uri="{FF2B5EF4-FFF2-40B4-BE49-F238E27FC236}">
@@ -6174,7 +6283,7 @@
 </p:sld>
 </file>
 
-<file path=ppt/slides/slide25.xml><?xml version="1.0" encoding="utf-8"?>
+<file path=ppt/slides/slide26.xml><?xml version="1.0" encoding="utf-8"?>
 <p:sld xmlns:a="http://schemas.openxmlformats.org/drawingml/2006/main" xmlns:r="http://schemas.openxmlformats.org/officeDocument/2006/relationships" xmlns:p="http://schemas.openxmlformats.org/presentationml/2006/main">
   <p:cSld>
     <p:spTree>
@@ -6311,7 +6420,7 @@
 </p:sld>
 </file>
 
-<file path=ppt/slides/slide26.xml><?xml version="1.0" encoding="utf-8"?>
+<file path=ppt/slides/slide27.xml><?xml version="1.0" encoding="utf-8"?>
 <p:sld xmlns:a="http://schemas.openxmlformats.org/drawingml/2006/main" xmlns:r="http://schemas.openxmlformats.org/officeDocument/2006/relationships" xmlns:p="http://schemas.openxmlformats.org/presentationml/2006/main">
   <p:cSld>
     <p:spTree>

--- a/ppt/IoTAI20-LiteRT.pptx
+++ b/ppt/IoTAI20-LiteRT.pptx
@@ -4629,6 +4629,39 @@
         <p:txBody>
           <a:bodyPr/>
           <a:lstStyle/>
+          <a:p>
+            <a:r>
+              <a:rPr lang="fr-FR" dirty="0"/>
+              <a:t>Demo Raspberry Pi</a:t>
+            </a:r>
+          </a:p>
+          <a:p>
+            <a:pPr lvl="1"/>
+            <a:r>
+              <a:rPr lang="fr-FR" dirty="0" err="1"/>
+              <a:t>pip</a:t>
+            </a:r>
+            <a:r>
+              <a:rPr lang="fr-FR" dirty="0"/>
+              <a:t> </a:t>
+            </a:r>
+            <a:r>
+              <a:rPr lang="fr-FR" dirty="0" err="1"/>
+              <a:t>install</a:t>
+            </a:r>
+            <a:r>
+              <a:rPr lang="fr-FR" dirty="0"/>
+              <a:t> </a:t>
+            </a:r>
+            <a:r>
+              <a:rPr lang="fr-FR" dirty="0" err="1"/>
+              <a:t>tflite</a:t>
+            </a:r>
+            <a:r>
+              <a:rPr lang="fr-FR"/>
+              <a:t>-runtime</a:t>
+            </a:r>
+          </a:p>
           <a:p>
             <a:r>
               <a:rPr lang="fr-FR" dirty="0" err="1"/>

--- a/ppt/IoTAI20-LiteRT.pptx
+++ b/ppt/IoTAI20-LiteRT.pptx
@@ -4631,39 +4631,6 @@
           <a:lstStyle/>
           <a:p>
             <a:r>
-              <a:rPr lang="fr-FR" dirty="0"/>
-              <a:t>Demo Raspberry Pi</a:t>
-            </a:r>
-          </a:p>
-          <a:p>
-            <a:pPr lvl="1"/>
-            <a:r>
-              <a:rPr lang="fr-FR" dirty="0" err="1"/>
-              <a:t>pip</a:t>
-            </a:r>
-            <a:r>
-              <a:rPr lang="fr-FR" dirty="0"/>
-              <a:t> </a:t>
-            </a:r>
-            <a:r>
-              <a:rPr lang="fr-FR" dirty="0" err="1"/>
-              <a:t>install</a:t>
-            </a:r>
-            <a:r>
-              <a:rPr lang="fr-FR" dirty="0"/>
-              <a:t> </a:t>
-            </a:r>
-            <a:r>
-              <a:rPr lang="fr-FR" dirty="0" err="1"/>
-              <a:t>tflite</a:t>
-            </a:r>
-            <a:r>
-              <a:rPr lang="fr-FR"/>
-              <a:t>-runtime</a:t>
-            </a:r>
-          </a:p>
-          <a:p>
-            <a:r>
               <a:rPr lang="fr-FR" dirty="0" err="1"/>
               <a:t>TFLite</a:t>
             </a:r>
@@ -4671,6 +4638,19 @@
               <a:rPr lang="fr-FR" dirty="0"/>
               <a:t> Cancer FP32</a:t>
             </a:r>
+          </a:p>
+          <a:p>
+            <a:r>
+              <a:rPr lang="fr-FR" dirty="0" err="1"/>
+              <a:t>TFLite</a:t>
+            </a:r>
+            <a:r>
+              <a:rPr lang="fr-FR"/>
+              <a:t> Raspberry Pi</a:t>
+            </a:r>
+          </a:p>
+          <a:p>
+            <a:endParaRPr lang="fr-FR" dirty="0"/>
           </a:p>
         </p:txBody>
       </p:sp>

--- a/ppt/IoTAI20-LiteRT.pptx
+++ b/ppt/IoTAI20-LiteRT.pptx
@@ -5,10 +5,10 @@
     <p:sldMasterId id="2147483653" r:id="rId1"/>
   </p:sldMasterIdLst>
   <p:notesMasterIdLst>
-    <p:notesMasterId r:id="rId29"/>
+    <p:notesMasterId r:id="rId30"/>
   </p:notesMasterIdLst>
   <p:handoutMasterIdLst>
-    <p:handoutMasterId r:id="rId30"/>
+    <p:handoutMasterId r:id="rId31"/>
   </p:handoutMasterIdLst>
   <p:sldIdLst>
     <p:sldId id="264" r:id="rId2"/>
@@ -37,7 +37,8 @@
     <p:sldId id="286" r:id="rId25"/>
     <p:sldId id="287" r:id="rId26"/>
     <p:sldId id="292" r:id="rId27"/>
-    <p:sldId id="289" r:id="rId28"/>
+    <p:sldId id="302" r:id="rId28"/>
+    <p:sldId id="289" r:id="rId29"/>
   </p:sldIdLst>
   <p:sldSz cx="9144000" cy="6858000" type="screen4x3"/>
   <p:notesSz cx="6648450" cy="9782175"/>
@@ -6434,6 +6435,111 @@
 </file>
 
 <file path=ppt/slides/slide27.xml><?xml version="1.0" encoding="utf-8"?>
+<p:sld xmlns:a="http://schemas.openxmlformats.org/drawingml/2006/main" xmlns:r="http://schemas.openxmlformats.org/officeDocument/2006/relationships" xmlns:p="http://schemas.openxmlformats.org/presentationml/2006/main">
+  <p:cSld>
+    <p:spTree>
+      <p:nvGrpSpPr>
+        <p:cNvPr id="1" name=""/>
+        <p:cNvGrpSpPr/>
+        <p:nvPr/>
+      </p:nvGrpSpPr>
+      <p:grpSpPr>
+        <a:xfrm>
+          <a:off x="0" y="0"/>
+          <a:ext cx="0" cy="0"/>
+          <a:chOff x="0" y="0"/>
+          <a:chExt cx="0" cy="0"/>
+        </a:xfrm>
+      </p:grpSpPr>
+      <p:sp>
+        <p:nvSpPr>
+          <p:cNvPr id="2" name="Titre 1">
+            <a:extLst>
+              <a:ext uri="{FF2B5EF4-FFF2-40B4-BE49-F238E27FC236}">
+                <a16:creationId xmlns:a16="http://schemas.microsoft.com/office/drawing/2014/main" id="{D4593A8E-5E84-FD26-71A2-10275D8DDABC}"/>
+              </a:ext>
+            </a:extLst>
+          </p:cNvPr>
+          <p:cNvSpPr>
+            <a:spLocks noGrp="1"/>
+          </p:cNvSpPr>
+          <p:nvPr>
+            <p:ph type="title"/>
+          </p:nvPr>
+        </p:nvSpPr>
+        <p:spPr/>
+        <p:txBody>
+          <a:bodyPr/>
+          <a:lstStyle/>
+          <a:p>
+            <a:r>
+              <a:rPr lang="fr-FR"/>
+              <a:t>IA Intégrées</a:t>
+            </a:r>
+            <a:endParaRPr lang="fr-FR" dirty="0"/>
+          </a:p>
+        </p:txBody>
+      </p:sp>
+      <p:sp>
+        <p:nvSpPr>
+          <p:cNvPr id="3" name="Espace réservé du contenu 2">
+            <a:extLst>
+              <a:ext uri="{FF2B5EF4-FFF2-40B4-BE49-F238E27FC236}">
+                <a16:creationId xmlns:a16="http://schemas.microsoft.com/office/drawing/2014/main" id="{D88702BE-F819-4798-86BA-FDEF90948898}"/>
+              </a:ext>
+            </a:extLst>
+          </p:cNvPr>
+          <p:cNvSpPr>
+            <a:spLocks noGrp="1"/>
+          </p:cNvSpPr>
+          <p:nvPr>
+            <p:ph idx="1"/>
+          </p:nvPr>
+        </p:nvSpPr>
+        <p:spPr/>
+        <p:txBody>
+          <a:bodyPr/>
+          <a:lstStyle/>
+          <a:p>
+            <a:r>
+              <a:rPr lang="fr-FR" dirty="0"/>
+              <a:t>IA Intégrées</a:t>
+            </a:r>
+          </a:p>
+          <a:p>
+            <a:pPr lvl="1"/>
+            <a:r>
+              <a:rPr lang="fr-FR" dirty="0">
+                <a:hlinkClick r:id="rId2"/>
+              </a:rPr>
+              <a:t>https://teachablemachine.withgoogle.com/</a:t>
+            </a:r>
+            <a:endParaRPr lang="fr-FR" dirty="0"/>
+          </a:p>
+          <a:p>
+            <a:pPr lvl="1"/>
+            <a:r>
+              <a:rPr lang="fr-FR" dirty="0" err="1"/>
+              <a:t>Roboflow</a:t>
+            </a:r>
+            <a:endParaRPr lang="fr-FR" dirty="0"/>
+          </a:p>
+        </p:txBody>
+      </p:sp>
+    </p:spTree>
+    <p:extLst>
+      <p:ext uri="{BB962C8B-B14F-4D97-AF65-F5344CB8AC3E}">
+        <p14:creationId xmlns:p14="http://schemas.microsoft.com/office/powerpoint/2010/main" val="4097127186"/>
+      </p:ext>
+    </p:extLst>
+  </p:cSld>
+  <p:clrMapOvr>
+    <a:masterClrMapping/>
+  </p:clrMapOvr>
+</p:sld>
+</file>
+
+<file path=ppt/slides/slide28.xml><?xml version="1.0" encoding="utf-8"?>
 <p:sld xmlns:a="http://schemas.openxmlformats.org/drawingml/2006/main" xmlns:r="http://schemas.openxmlformats.org/officeDocument/2006/relationships" xmlns:p="http://schemas.openxmlformats.org/presentationml/2006/main">
   <p:cSld>
     <p:spTree>

--- a/ppt/IoTAI20-LiteRT.pptx
+++ b/ppt/IoTAI20-LiteRT.pptx
@@ -5,10 +5,10 @@
     <p:sldMasterId id="2147483653" r:id="rId1"/>
   </p:sldMasterIdLst>
   <p:notesMasterIdLst>
-    <p:notesMasterId r:id="rId30"/>
+    <p:notesMasterId r:id="rId29"/>
   </p:notesMasterIdLst>
   <p:handoutMasterIdLst>
-    <p:handoutMasterId r:id="rId31"/>
+    <p:handoutMasterId r:id="rId30"/>
   </p:handoutMasterIdLst>
   <p:sldIdLst>
     <p:sldId id="264" r:id="rId2"/>
@@ -37,8 +37,7 @@
     <p:sldId id="286" r:id="rId25"/>
     <p:sldId id="287" r:id="rId26"/>
     <p:sldId id="292" r:id="rId27"/>
-    <p:sldId id="302" r:id="rId28"/>
-    <p:sldId id="289" r:id="rId29"/>
+    <p:sldId id="289" r:id="rId28"/>
   </p:sldIdLst>
   <p:sldSz cx="9144000" cy="6858000" type="screen4x3"/>
   <p:notesSz cx="6648450" cy="9782175"/>
@@ -6435,111 +6434,6 @@
 </file>
 
 <file path=ppt/slides/slide27.xml><?xml version="1.0" encoding="utf-8"?>
-<p:sld xmlns:a="http://schemas.openxmlformats.org/drawingml/2006/main" xmlns:r="http://schemas.openxmlformats.org/officeDocument/2006/relationships" xmlns:p="http://schemas.openxmlformats.org/presentationml/2006/main">
-  <p:cSld>
-    <p:spTree>
-      <p:nvGrpSpPr>
-        <p:cNvPr id="1" name=""/>
-        <p:cNvGrpSpPr/>
-        <p:nvPr/>
-      </p:nvGrpSpPr>
-      <p:grpSpPr>
-        <a:xfrm>
-          <a:off x="0" y="0"/>
-          <a:ext cx="0" cy="0"/>
-          <a:chOff x="0" y="0"/>
-          <a:chExt cx="0" cy="0"/>
-        </a:xfrm>
-      </p:grpSpPr>
-      <p:sp>
-        <p:nvSpPr>
-          <p:cNvPr id="2" name="Titre 1">
-            <a:extLst>
-              <a:ext uri="{FF2B5EF4-FFF2-40B4-BE49-F238E27FC236}">
-                <a16:creationId xmlns:a16="http://schemas.microsoft.com/office/drawing/2014/main" id="{D4593A8E-5E84-FD26-71A2-10275D8DDABC}"/>
-              </a:ext>
-            </a:extLst>
-          </p:cNvPr>
-          <p:cNvSpPr>
-            <a:spLocks noGrp="1"/>
-          </p:cNvSpPr>
-          <p:nvPr>
-            <p:ph type="title"/>
-          </p:nvPr>
-        </p:nvSpPr>
-        <p:spPr/>
-        <p:txBody>
-          <a:bodyPr/>
-          <a:lstStyle/>
-          <a:p>
-            <a:r>
-              <a:rPr lang="fr-FR"/>
-              <a:t>IA Intégrées</a:t>
-            </a:r>
-            <a:endParaRPr lang="fr-FR" dirty="0"/>
-          </a:p>
-        </p:txBody>
-      </p:sp>
-      <p:sp>
-        <p:nvSpPr>
-          <p:cNvPr id="3" name="Espace réservé du contenu 2">
-            <a:extLst>
-              <a:ext uri="{FF2B5EF4-FFF2-40B4-BE49-F238E27FC236}">
-                <a16:creationId xmlns:a16="http://schemas.microsoft.com/office/drawing/2014/main" id="{D88702BE-F819-4798-86BA-FDEF90948898}"/>
-              </a:ext>
-            </a:extLst>
-          </p:cNvPr>
-          <p:cNvSpPr>
-            <a:spLocks noGrp="1"/>
-          </p:cNvSpPr>
-          <p:nvPr>
-            <p:ph idx="1"/>
-          </p:nvPr>
-        </p:nvSpPr>
-        <p:spPr/>
-        <p:txBody>
-          <a:bodyPr/>
-          <a:lstStyle/>
-          <a:p>
-            <a:r>
-              <a:rPr lang="fr-FR" dirty="0"/>
-              <a:t>IA Intégrées</a:t>
-            </a:r>
-          </a:p>
-          <a:p>
-            <a:pPr lvl="1"/>
-            <a:r>
-              <a:rPr lang="fr-FR" dirty="0">
-                <a:hlinkClick r:id="rId2"/>
-              </a:rPr>
-              <a:t>https://teachablemachine.withgoogle.com/</a:t>
-            </a:r>
-            <a:endParaRPr lang="fr-FR" dirty="0"/>
-          </a:p>
-          <a:p>
-            <a:pPr lvl="1"/>
-            <a:r>
-              <a:rPr lang="fr-FR" dirty="0" err="1"/>
-              <a:t>Roboflow</a:t>
-            </a:r>
-            <a:endParaRPr lang="fr-FR" dirty="0"/>
-          </a:p>
-        </p:txBody>
-      </p:sp>
-    </p:spTree>
-    <p:extLst>
-      <p:ext uri="{BB962C8B-B14F-4D97-AF65-F5344CB8AC3E}">
-        <p14:creationId xmlns:p14="http://schemas.microsoft.com/office/powerpoint/2010/main" val="4097127186"/>
-      </p:ext>
-    </p:extLst>
-  </p:cSld>
-  <p:clrMapOvr>
-    <a:masterClrMapping/>
-  </p:clrMapOvr>
-</p:sld>
-</file>
-
-<file path=ppt/slides/slide28.xml><?xml version="1.0" encoding="utf-8"?>
 <p:sld xmlns:a="http://schemas.openxmlformats.org/drawingml/2006/main" xmlns:r="http://schemas.openxmlformats.org/officeDocument/2006/relationships" xmlns:p="http://schemas.openxmlformats.org/presentationml/2006/main">
   <p:cSld>
     <p:spTree>
